--- a/검정 임용고시 2010.pptx
+++ b/검정 임용고시 2010.pptx
@@ -14,6 +14,7 @@
     <p:sldId id="281" r:id="rId8"/>
     <p:sldId id="280" r:id="rId9"/>
     <p:sldId id="282" r:id="rId10"/>
+    <p:sldId id="283" r:id="rId11"/>
   </p:sldIdLst>
   <p:sldSz cx="12192000" cy="6858000"/>
   <p:notesSz cx="6858000" cy="9144000"/>
@@ -162,10 +163,9 @@
           </a:lstStyle>
           <a:p>
             <a:r>
-              <a:rPr lang="en-US" smtClean="0"/>
+              <a:rPr lang="en-US"/>
               <a:t>Click to edit Master title style</a:t>
             </a:r>
-            <a:endParaRPr lang="en-US"/>
           </a:p>
         </p:txBody>
       </p:sp>
@@ -227,10 +227,9 @@
           </a:lstStyle>
           <a:p>
             <a:r>
-              <a:rPr lang="en-US" smtClean="0"/>
+              <a:rPr lang="en-US"/>
               <a:t>Click to edit Master subtitle style</a:t>
             </a:r>
-            <a:endParaRPr lang="en-US"/>
           </a:p>
         </p:txBody>
       </p:sp>
@@ -251,7 +250,7 @@
           <a:p>
             <a:fld id="{5B3AD1D6-AE87-C841-B3FD-7C9F7FCAE5AE}" type="datetimeFigureOut">
               <a:rPr lang="en-US" smtClean="0"/>
-              <a:t>12/15/19</a:t>
+              <a:t>12/23/19</a:t>
             </a:fld>
             <a:endParaRPr lang="en-US"/>
           </a:p>
@@ -345,10 +344,9 @@
           <a:lstStyle/>
           <a:p>
             <a:r>
-              <a:rPr lang="en-US" smtClean="0"/>
+              <a:rPr lang="en-US"/>
               <a:t>Click to edit Master title style</a:t>
             </a:r>
-            <a:endParaRPr lang="en-US"/>
           </a:p>
         </p:txBody>
       </p:sp>
@@ -369,38 +367,37 @@
           <a:p>
             <a:pPr lvl="0"/>
             <a:r>
-              <a:rPr lang="en-US" smtClean="0"/>
+              <a:rPr lang="en-US"/>
               <a:t>Click to edit Master text styles</a:t>
             </a:r>
           </a:p>
           <a:p>
             <a:pPr lvl="1"/>
             <a:r>
-              <a:rPr lang="en-US" smtClean="0"/>
+              <a:rPr lang="en-US"/>
               <a:t>Second level</a:t>
             </a:r>
           </a:p>
           <a:p>
             <a:pPr lvl="2"/>
             <a:r>
-              <a:rPr lang="en-US" smtClean="0"/>
+              <a:rPr lang="en-US"/>
               <a:t>Third level</a:t>
             </a:r>
           </a:p>
           <a:p>
             <a:pPr lvl="3"/>
             <a:r>
-              <a:rPr lang="en-US" smtClean="0"/>
+              <a:rPr lang="en-US"/>
               <a:t>Fourth level</a:t>
             </a:r>
           </a:p>
           <a:p>
             <a:pPr lvl="4"/>
             <a:r>
-              <a:rPr lang="en-US" smtClean="0"/>
+              <a:rPr lang="en-US"/>
               <a:t>Fifth level</a:t>
             </a:r>
-            <a:endParaRPr lang="en-US"/>
           </a:p>
         </p:txBody>
       </p:sp>
@@ -421,7 +418,7 @@
           <a:p>
             <a:fld id="{5B3AD1D6-AE87-C841-B3FD-7C9F7FCAE5AE}" type="datetimeFigureOut">
               <a:rPr lang="en-US" smtClean="0"/>
-              <a:t>12/15/19</a:t>
+              <a:t>12/23/19</a:t>
             </a:fld>
             <a:endParaRPr lang="en-US"/>
           </a:p>
@@ -520,10 +517,9 @@
           <a:lstStyle/>
           <a:p>
             <a:r>
-              <a:rPr lang="en-US" smtClean="0"/>
+              <a:rPr lang="en-US"/>
               <a:t>Click to edit Master title style</a:t>
             </a:r>
-            <a:endParaRPr lang="en-US"/>
           </a:p>
         </p:txBody>
       </p:sp>
@@ -549,38 +545,37 @@
           <a:p>
             <a:pPr lvl="0"/>
             <a:r>
-              <a:rPr lang="en-US" smtClean="0"/>
+              <a:rPr lang="en-US"/>
               <a:t>Click to edit Master text styles</a:t>
             </a:r>
           </a:p>
           <a:p>
             <a:pPr lvl="1"/>
             <a:r>
-              <a:rPr lang="en-US" smtClean="0"/>
+              <a:rPr lang="en-US"/>
               <a:t>Second level</a:t>
             </a:r>
           </a:p>
           <a:p>
             <a:pPr lvl="2"/>
             <a:r>
-              <a:rPr lang="en-US" smtClean="0"/>
+              <a:rPr lang="en-US"/>
               <a:t>Third level</a:t>
             </a:r>
           </a:p>
           <a:p>
             <a:pPr lvl="3"/>
             <a:r>
-              <a:rPr lang="en-US" smtClean="0"/>
+              <a:rPr lang="en-US"/>
               <a:t>Fourth level</a:t>
             </a:r>
           </a:p>
           <a:p>
             <a:pPr lvl="4"/>
             <a:r>
-              <a:rPr lang="en-US" smtClean="0"/>
+              <a:rPr lang="en-US"/>
               <a:t>Fifth level</a:t>
             </a:r>
-            <a:endParaRPr lang="en-US"/>
           </a:p>
         </p:txBody>
       </p:sp>
@@ -601,7 +596,7 @@
           <a:p>
             <a:fld id="{5B3AD1D6-AE87-C841-B3FD-7C9F7FCAE5AE}" type="datetimeFigureOut">
               <a:rPr lang="en-US" smtClean="0"/>
-              <a:t>12/15/19</a:t>
+              <a:t>12/23/19</a:t>
             </a:fld>
             <a:endParaRPr lang="en-US"/>
           </a:p>
@@ -695,10 +690,9 @@
           <a:lstStyle/>
           <a:p>
             <a:r>
-              <a:rPr lang="en-US" smtClean="0"/>
+              <a:rPr lang="en-US"/>
               <a:t>Click to edit Master title style</a:t>
             </a:r>
-            <a:endParaRPr lang="en-US"/>
           </a:p>
         </p:txBody>
       </p:sp>
@@ -719,38 +713,37 @@
           <a:p>
             <a:pPr lvl="0"/>
             <a:r>
-              <a:rPr lang="en-US" smtClean="0"/>
+              <a:rPr lang="en-US"/>
               <a:t>Click to edit Master text styles</a:t>
             </a:r>
           </a:p>
           <a:p>
             <a:pPr lvl="1"/>
             <a:r>
-              <a:rPr lang="en-US" smtClean="0"/>
+              <a:rPr lang="en-US"/>
               <a:t>Second level</a:t>
             </a:r>
           </a:p>
           <a:p>
             <a:pPr lvl="2"/>
             <a:r>
-              <a:rPr lang="en-US" smtClean="0"/>
+              <a:rPr lang="en-US"/>
               <a:t>Third level</a:t>
             </a:r>
           </a:p>
           <a:p>
             <a:pPr lvl="3"/>
             <a:r>
-              <a:rPr lang="en-US" smtClean="0"/>
+              <a:rPr lang="en-US"/>
               <a:t>Fourth level</a:t>
             </a:r>
           </a:p>
           <a:p>
             <a:pPr lvl="4"/>
             <a:r>
-              <a:rPr lang="en-US" smtClean="0"/>
+              <a:rPr lang="en-US"/>
               <a:t>Fifth level</a:t>
             </a:r>
-            <a:endParaRPr lang="en-US"/>
           </a:p>
         </p:txBody>
       </p:sp>
@@ -771,7 +764,7 @@
           <a:p>
             <a:fld id="{5B3AD1D6-AE87-C841-B3FD-7C9F7FCAE5AE}" type="datetimeFigureOut">
               <a:rPr lang="en-US" smtClean="0"/>
-              <a:t>12/15/19</a:t>
+              <a:t>12/23/19</a:t>
             </a:fld>
             <a:endParaRPr lang="en-US"/>
           </a:p>
@@ -874,10 +867,9 @@
           </a:lstStyle>
           <a:p>
             <a:r>
-              <a:rPr lang="en-US" smtClean="0"/>
+              <a:rPr lang="en-US"/>
               <a:t>Click to edit Master title style</a:t>
             </a:r>
-            <a:endParaRPr lang="en-US"/>
           </a:p>
         </p:txBody>
       </p:sp>
@@ -994,7 +986,7 @@
           <a:p>
             <a:pPr lvl="0"/>
             <a:r>
-              <a:rPr lang="en-US" smtClean="0"/>
+              <a:rPr lang="en-US"/>
               <a:t>Click to edit Master text styles</a:t>
             </a:r>
           </a:p>
@@ -1017,7 +1009,7 @@
           <a:p>
             <a:fld id="{5B3AD1D6-AE87-C841-B3FD-7C9F7FCAE5AE}" type="datetimeFigureOut">
               <a:rPr lang="en-US" smtClean="0"/>
-              <a:t>12/15/19</a:t>
+              <a:t>12/23/19</a:t>
             </a:fld>
             <a:endParaRPr lang="en-US"/>
           </a:p>
@@ -1111,10 +1103,9 @@
           <a:lstStyle/>
           <a:p>
             <a:r>
-              <a:rPr lang="en-US" smtClean="0"/>
+              <a:rPr lang="en-US"/>
               <a:t>Click to edit Master title style</a:t>
             </a:r>
-            <a:endParaRPr lang="en-US"/>
           </a:p>
         </p:txBody>
       </p:sp>
@@ -1140,38 +1131,37 @@
           <a:p>
             <a:pPr lvl="0"/>
             <a:r>
-              <a:rPr lang="en-US" smtClean="0"/>
+              <a:rPr lang="en-US"/>
               <a:t>Click to edit Master text styles</a:t>
             </a:r>
           </a:p>
           <a:p>
             <a:pPr lvl="1"/>
             <a:r>
-              <a:rPr lang="en-US" smtClean="0"/>
+              <a:rPr lang="en-US"/>
               <a:t>Second level</a:t>
             </a:r>
           </a:p>
           <a:p>
             <a:pPr lvl="2"/>
             <a:r>
-              <a:rPr lang="en-US" smtClean="0"/>
+              <a:rPr lang="en-US"/>
               <a:t>Third level</a:t>
             </a:r>
           </a:p>
           <a:p>
             <a:pPr lvl="3"/>
             <a:r>
-              <a:rPr lang="en-US" smtClean="0"/>
+              <a:rPr lang="en-US"/>
               <a:t>Fourth level</a:t>
             </a:r>
           </a:p>
           <a:p>
             <a:pPr lvl="4"/>
             <a:r>
-              <a:rPr lang="en-US" smtClean="0"/>
+              <a:rPr lang="en-US"/>
               <a:t>Fifth level</a:t>
             </a:r>
-            <a:endParaRPr lang="en-US"/>
           </a:p>
         </p:txBody>
       </p:sp>
@@ -1197,38 +1187,37 @@
           <a:p>
             <a:pPr lvl="0"/>
             <a:r>
-              <a:rPr lang="en-US" smtClean="0"/>
+              <a:rPr lang="en-US"/>
               <a:t>Click to edit Master text styles</a:t>
             </a:r>
           </a:p>
           <a:p>
             <a:pPr lvl="1"/>
             <a:r>
-              <a:rPr lang="en-US" smtClean="0"/>
+              <a:rPr lang="en-US"/>
               <a:t>Second level</a:t>
             </a:r>
           </a:p>
           <a:p>
             <a:pPr lvl="2"/>
             <a:r>
-              <a:rPr lang="en-US" smtClean="0"/>
+              <a:rPr lang="en-US"/>
               <a:t>Third level</a:t>
             </a:r>
           </a:p>
           <a:p>
             <a:pPr lvl="3"/>
             <a:r>
-              <a:rPr lang="en-US" smtClean="0"/>
+              <a:rPr lang="en-US"/>
               <a:t>Fourth level</a:t>
             </a:r>
           </a:p>
           <a:p>
             <a:pPr lvl="4"/>
             <a:r>
-              <a:rPr lang="en-US" smtClean="0"/>
+              <a:rPr lang="en-US"/>
               <a:t>Fifth level</a:t>
             </a:r>
-            <a:endParaRPr lang="en-US"/>
           </a:p>
         </p:txBody>
       </p:sp>
@@ -1249,7 +1238,7 @@
           <a:p>
             <a:fld id="{5B3AD1D6-AE87-C841-B3FD-7C9F7FCAE5AE}" type="datetimeFigureOut">
               <a:rPr lang="en-US" smtClean="0"/>
-              <a:t>12/15/19</a:t>
+              <a:t>12/23/19</a:t>
             </a:fld>
             <a:endParaRPr lang="en-US"/>
           </a:p>
@@ -1348,10 +1337,9 @@
           <a:lstStyle/>
           <a:p>
             <a:r>
-              <a:rPr lang="en-US" smtClean="0"/>
+              <a:rPr lang="en-US"/>
               <a:t>Click to edit Master title style</a:t>
             </a:r>
-            <a:endParaRPr lang="en-US"/>
           </a:p>
         </p:txBody>
       </p:sp>
@@ -1414,7 +1402,7 @@
           <a:p>
             <a:pPr lvl="0"/>
             <a:r>
-              <a:rPr lang="en-US" smtClean="0"/>
+              <a:rPr lang="en-US"/>
               <a:t>Click to edit Master text styles</a:t>
             </a:r>
           </a:p>
@@ -1442,38 +1430,37 @@
           <a:p>
             <a:pPr lvl="0"/>
             <a:r>
-              <a:rPr lang="en-US" smtClean="0"/>
+              <a:rPr lang="en-US"/>
               <a:t>Click to edit Master text styles</a:t>
             </a:r>
           </a:p>
           <a:p>
             <a:pPr lvl="1"/>
             <a:r>
-              <a:rPr lang="en-US" smtClean="0"/>
+              <a:rPr lang="en-US"/>
               <a:t>Second level</a:t>
             </a:r>
           </a:p>
           <a:p>
             <a:pPr lvl="2"/>
             <a:r>
-              <a:rPr lang="en-US" smtClean="0"/>
+              <a:rPr lang="en-US"/>
               <a:t>Third level</a:t>
             </a:r>
           </a:p>
           <a:p>
             <a:pPr lvl="3"/>
             <a:r>
-              <a:rPr lang="en-US" smtClean="0"/>
+              <a:rPr lang="en-US"/>
               <a:t>Fourth level</a:t>
             </a:r>
           </a:p>
           <a:p>
             <a:pPr lvl="4"/>
             <a:r>
-              <a:rPr lang="en-US" smtClean="0"/>
+              <a:rPr lang="en-US"/>
               <a:t>Fifth level</a:t>
             </a:r>
-            <a:endParaRPr lang="en-US"/>
           </a:p>
         </p:txBody>
       </p:sp>
@@ -1536,7 +1523,7 @@
           <a:p>
             <a:pPr lvl="0"/>
             <a:r>
-              <a:rPr lang="en-US" smtClean="0"/>
+              <a:rPr lang="en-US"/>
               <a:t>Click to edit Master text styles</a:t>
             </a:r>
           </a:p>
@@ -1564,38 +1551,37 @@
           <a:p>
             <a:pPr lvl="0"/>
             <a:r>
-              <a:rPr lang="en-US" smtClean="0"/>
+              <a:rPr lang="en-US"/>
               <a:t>Click to edit Master text styles</a:t>
             </a:r>
           </a:p>
           <a:p>
             <a:pPr lvl="1"/>
             <a:r>
-              <a:rPr lang="en-US" smtClean="0"/>
+              <a:rPr lang="en-US"/>
               <a:t>Second level</a:t>
             </a:r>
           </a:p>
           <a:p>
             <a:pPr lvl="2"/>
             <a:r>
-              <a:rPr lang="en-US" smtClean="0"/>
+              <a:rPr lang="en-US"/>
               <a:t>Third level</a:t>
             </a:r>
           </a:p>
           <a:p>
             <a:pPr lvl="3"/>
             <a:r>
-              <a:rPr lang="en-US" smtClean="0"/>
+              <a:rPr lang="en-US"/>
               <a:t>Fourth level</a:t>
             </a:r>
           </a:p>
           <a:p>
             <a:pPr lvl="4"/>
             <a:r>
-              <a:rPr lang="en-US" smtClean="0"/>
+              <a:rPr lang="en-US"/>
               <a:t>Fifth level</a:t>
             </a:r>
-            <a:endParaRPr lang="en-US"/>
           </a:p>
         </p:txBody>
       </p:sp>
@@ -1616,7 +1602,7 @@
           <a:p>
             <a:fld id="{5B3AD1D6-AE87-C841-B3FD-7C9F7FCAE5AE}" type="datetimeFigureOut">
               <a:rPr lang="en-US" smtClean="0"/>
-              <a:t>12/15/19</a:t>
+              <a:t>12/23/19</a:t>
             </a:fld>
             <a:endParaRPr lang="en-US"/>
           </a:p>
@@ -1710,10 +1696,9 @@
           <a:lstStyle/>
           <a:p>
             <a:r>
-              <a:rPr lang="en-US" smtClean="0"/>
+              <a:rPr lang="en-US"/>
               <a:t>Click to edit Master title style</a:t>
             </a:r>
-            <a:endParaRPr lang="en-US"/>
           </a:p>
         </p:txBody>
       </p:sp>
@@ -1734,7 +1719,7 @@
           <a:p>
             <a:fld id="{5B3AD1D6-AE87-C841-B3FD-7C9F7FCAE5AE}" type="datetimeFigureOut">
               <a:rPr lang="en-US" smtClean="0"/>
-              <a:t>12/15/19</a:t>
+              <a:t>12/23/19</a:t>
             </a:fld>
             <a:endParaRPr lang="en-US"/>
           </a:p>
@@ -1829,7 +1814,7 @@
           <a:p>
             <a:fld id="{5B3AD1D6-AE87-C841-B3FD-7C9F7FCAE5AE}" type="datetimeFigureOut">
               <a:rPr lang="en-US" smtClean="0"/>
-              <a:t>12/15/19</a:t>
+              <a:t>12/23/19</a:t>
             </a:fld>
             <a:endParaRPr lang="en-US"/>
           </a:p>
@@ -1932,10 +1917,9 @@
           </a:lstStyle>
           <a:p>
             <a:r>
-              <a:rPr lang="en-US" smtClean="0"/>
+              <a:rPr lang="en-US"/>
               <a:t>Click to edit Master title style</a:t>
             </a:r>
-            <a:endParaRPr lang="en-US"/>
           </a:p>
         </p:txBody>
       </p:sp>
@@ -1989,38 +1973,37 @@
           <a:p>
             <a:pPr lvl="0"/>
             <a:r>
-              <a:rPr lang="en-US" smtClean="0"/>
+              <a:rPr lang="en-US"/>
               <a:t>Click to edit Master text styles</a:t>
             </a:r>
           </a:p>
           <a:p>
             <a:pPr lvl="1"/>
             <a:r>
-              <a:rPr lang="en-US" smtClean="0"/>
+              <a:rPr lang="en-US"/>
               <a:t>Second level</a:t>
             </a:r>
           </a:p>
           <a:p>
             <a:pPr lvl="2"/>
             <a:r>
-              <a:rPr lang="en-US" smtClean="0"/>
+              <a:rPr lang="en-US"/>
               <a:t>Third level</a:t>
             </a:r>
           </a:p>
           <a:p>
             <a:pPr lvl="3"/>
             <a:r>
-              <a:rPr lang="en-US" smtClean="0"/>
+              <a:rPr lang="en-US"/>
               <a:t>Fourth level</a:t>
             </a:r>
           </a:p>
           <a:p>
             <a:pPr lvl="4"/>
             <a:r>
-              <a:rPr lang="en-US" smtClean="0"/>
+              <a:rPr lang="en-US"/>
               <a:t>Fifth level</a:t>
             </a:r>
-            <a:endParaRPr lang="en-US"/>
           </a:p>
         </p:txBody>
       </p:sp>
@@ -2083,7 +2066,7 @@
           <a:p>
             <a:pPr lvl="0"/>
             <a:r>
-              <a:rPr lang="en-US" smtClean="0"/>
+              <a:rPr lang="en-US"/>
               <a:t>Click to edit Master text styles</a:t>
             </a:r>
           </a:p>
@@ -2106,7 +2089,7 @@
           <a:p>
             <a:fld id="{5B3AD1D6-AE87-C841-B3FD-7C9F7FCAE5AE}" type="datetimeFigureOut">
               <a:rPr lang="en-US" smtClean="0"/>
-              <a:t>12/15/19</a:t>
+              <a:t>12/23/19</a:t>
             </a:fld>
             <a:endParaRPr lang="en-US"/>
           </a:p>
@@ -2209,10 +2192,9 @@
           </a:lstStyle>
           <a:p>
             <a:r>
-              <a:rPr lang="en-US" smtClean="0"/>
+              <a:rPr lang="en-US"/>
               <a:t>Click to edit Master title style</a:t>
             </a:r>
-            <a:endParaRPr lang="en-US"/>
           </a:p>
         </p:txBody>
       </p:sp>
@@ -2336,7 +2318,7 @@
           <a:p>
             <a:pPr lvl="0"/>
             <a:r>
-              <a:rPr lang="en-US" smtClean="0"/>
+              <a:rPr lang="en-US"/>
               <a:t>Click to edit Master text styles</a:t>
             </a:r>
           </a:p>
@@ -2359,7 +2341,7 @@
           <a:p>
             <a:fld id="{5B3AD1D6-AE87-C841-B3FD-7C9F7FCAE5AE}" type="datetimeFigureOut">
               <a:rPr lang="en-US" smtClean="0"/>
-              <a:t>12/15/19</a:t>
+              <a:t>12/23/19</a:t>
             </a:fld>
             <a:endParaRPr lang="en-US"/>
           </a:p>
@@ -2468,10 +2450,9 @@
           <a:lstStyle/>
           <a:p>
             <a:r>
-              <a:rPr lang="en-US" smtClean="0"/>
+              <a:rPr lang="en-US"/>
               <a:t>Click to edit Master title style</a:t>
             </a:r>
-            <a:endParaRPr lang="en-US"/>
           </a:p>
         </p:txBody>
       </p:sp>
@@ -2502,38 +2483,37 @@
           <a:p>
             <a:pPr lvl="0"/>
             <a:r>
-              <a:rPr lang="en-US" smtClean="0"/>
+              <a:rPr lang="en-US"/>
               <a:t>Click to edit Master text styles</a:t>
             </a:r>
           </a:p>
           <a:p>
             <a:pPr lvl="1"/>
             <a:r>
-              <a:rPr lang="en-US" smtClean="0"/>
+              <a:rPr lang="en-US"/>
               <a:t>Second level</a:t>
             </a:r>
           </a:p>
           <a:p>
             <a:pPr lvl="2"/>
             <a:r>
-              <a:rPr lang="en-US" smtClean="0"/>
+              <a:rPr lang="en-US"/>
               <a:t>Third level</a:t>
             </a:r>
           </a:p>
           <a:p>
             <a:pPr lvl="3"/>
             <a:r>
-              <a:rPr lang="en-US" smtClean="0"/>
+              <a:rPr lang="en-US"/>
               <a:t>Fourth level</a:t>
             </a:r>
           </a:p>
           <a:p>
             <a:pPr lvl="4"/>
             <a:r>
-              <a:rPr lang="en-US" smtClean="0"/>
+              <a:rPr lang="en-US"/>
               <a:t>Fifth level</a:t>
             </a:r>
-            <a:endParaRPr lang="en-US"/>
           </a:p>
         </p:txBody>
       </p:sp>
@@ -2572,7 +2552,7 @@
           <a:p>
             <a:fld id="{5B3AD1D6-AE87-C841-B3FD-7C9F7FCAE5AE}" type="datetimeFigureOut">
               <a:rPr lang="en-US" smtClean="0"/>
-              <a:t>12/15/19</a:t>
+              <a:t>12/23/19</a:t>
             </a:fld>
             <a:endParaRPr lang="en-US"/>
           </a:p>
@@ -2999,29 +2979,6 @@
           </a:bodyPr>
           <a:lstStyle/>
           <a:p>
-            <a:r>
-              <a:rPr lang="en-US" sz="4000" dirty="0" smtClean="0">
-                <a:latin typeface="Arial Black" charset="0"/>
-                <a:ea typeface="Arial Black" charset="0"/>
-                <a:cs typeface="Arial Black" charset="0"/>
-              </a:rPr>
-              <a:t/>
-            </a:r>
-            <a:br>
-              <a:rPr lang="en-US" sz="4000" dirty="0" smtClean="0">
-                <a:latin typeface="Arial Black" charset="0"/>
-                <a:ea typeface="Arial Black" charset="0"/>
-                <a:cs typeface="Arial Black" charset="0"/>
-              </a:rPr>
-            </a:br>
-            <a:r>
-              <a:rPr lang="en-US" sz="4000" dirty="0">
-                <a:latin typeface="Arial Black" charset="0"/>
-                <a:ea typeface="Arial Black" charset="0"/>
-                <a:cs typeface="Arial Black" charset="0"/>
-              </a:rPr>
-              <a:t/>
-            </a:r>
             <a:br>
               <a:rPr lang="en-US" sz="4000" dirty="0">
                 <a:latin typeface="Arial Black" charset="0"/>
@@ -3029,29 +2986,6 @@
                 <a:cs typeface="Arial Black" charset="0"/>
               </a:rPr>
             </a:br>
-            <a:r>
-              <a:rPr lang="en-US" sz="4000" dirty="0" smtClean="0">
-                <a:latin typeface="Arial Black" charset="0"/>
-                <a:ea typeface="Arial Black" charset="0"/>
-                <a:cs typeface="Arial Black" charset="0"/>
-              </a:rPr>
-              <a:t/>
-            </a:r>
-            <a:br>
-              <a:rPr lang="en-US" sz="4000" dirty="0" smtClean="0">
-                <a:latin typeface="Arial Black" charset="0"/>
-                <a:ea typeface="Arial Black" charset="0"/>
-                <a:cs typeface="Arial Black" charset="0"/>
-              </a:rPr>
-            </a:br>
-            <a:r>
-              <a:rPr lang="en-US" sz="4000" dirty="0">
-                <a:latin typeface="Arial Black" charset="0"/>
-                <a:ea typeface="Arial Black" charset="0"/>
-                <a:cs typeface="Arial Black" charset="0"/>
-              </a:rPr>
-              <a:t/>
-            </a:r>
             <a:br>
               <a:rPr lang="en-US" sz="4000" dirty="0">
                 <a:latin typeface="Arial Black" charset="0"/>
@@ -3059,29 +2993,6 @@
                 <a:cs typeface="Arial Black" charset="0"/>
               </a:rPr>
             </a:br>
-            <a:r>
-              <a:rPr lang="en-US" sz="4000" dirty="0" smtClean="0">
-                <a:latin typeface="Arial Black" charset="0"/>
-                <a:ea typeface="Arial Black" charset="0"/>
-                <a:cs typeface="Arial Black" charset="0"/>
-              </a:rPr>
-              <a:t/>
-            </a:r>
-            <a:br>
-              <a:rPr lang="en-US" sz="4000" dirty="0" smtClean="0">
-                <a:latin typeface="Arial Black" charset="0"/>
-                <a:ea typeface="Arial Black" charset="0"/>
-                <a:cs typeface="Arial Black" charset="0"/>
-              </a:rPr>
-            </a:br>
-            <a:r>
-              <a:rPr lang="en-US" sz="4000" dirty="0">
-                <a:latin typeface="Arial Black" charset="0"/>
-                <a:ea typeface="Arial Black" charset="0"/>
-                <a:cs typeface="Arial Black" charset="0"/>
-              </a:rPr>
-              <a:t/>
-            </a:r>
             <a:br>
               <a:rPr lang="en-US" sz="4000" dirty="0">
                 <a:latin typeface="Arial Black" charset="0"/>
@@ -3089,29 +3000,6 @@
                 <a:cs typeface="Arial Black" charset="0"/>
               </a:rPr>
             </a:br>
-            <a:r>
-              <a:rPr lang="en-US" sz="4000" dirty="0" smtClean="0">
-                <a:latin typeface="Arial Black" charset="0"/>
-                <a:ea typeface="Arial Black" charset="0"/>
-                <a:cs typeface="Arial Black" charset="0"/>
-              </a:rPr>
-              <a:t/>
-            </a:r>
-            <a:br>
-              <a:rPr lang="en-US" sz="4000" dirty="0" smtClean="0">
-                <a:latin typeface="Arial Black" charset="0"/>
-                <a:ea typeface="Arial Black" charset="0"/>
-                <a:cs typeface="Arial Black" charset="0"/>
-              </a:rPr>
-            </a:br>
-            <a:r>
-              <a:rPr lang="en-US" sz="4000" dirty="0">
-                <a:latin typeface="Arial Black" charset="0"/>
-                <a:ea typeface="Arial Black" charset="0"/>
-                <a:cs typeface="Arial Black" charset="0"/>
-              </a:rPr>
-              <a:t/>
-            </a:r>
             <a:br>
               <a:rPr lang="en-US" sz="4000" dirty="0">
                 <a:latin typeface="Arial Black" charset="0"/>
@@ -3119,29 +3007,6 @@
                 <a:cs typeface="Arial Black" charset="0"/>
               </a:rPr>
             </a:br>
-            <a:r>
-              <a:rPr lang="en-US" sz="4000" dirty="0" smtClean="0">
-                <a:latin typeface="Arial Black" charset="0"/>
-                <a:ea typeface="Arial Black" charset="0"/>
-                <a:cs typeface="Arial Black" charset="0"/>
-              </a:rPr>
-              <a:t/>
-            </a:r>
-            <a:br>
-              <a:rPr lang="en-US" sz="4000" dirty="0" smtClean="0">
-                <a:latin typeface="Arial Black" charset="0"/>
-                <a:ea typeface="Arial Black" charset="0"/>
-                <a:cs typeface="Arial Black" charset="0"/>
-              </a:rPr>
-            </a:br>
-            <a:r>
-              <a:rPr lang="en-US" sz="4000" dirty="0">
-                <a:latin typeface="Arial Black" charset="0"/>
-                <a:ea typeface="Arial Black" charset="0"/>
-                <a:cs typeface="Arial Black" charset="0"/>
-              </a:rPr>
-              <a:t/>
-            </a:r>
             <a:br>
               <a:rPr lang="en-US" sz="4000" dirty="0">
                 <a:latin typeface="Arial Black" charset="0"/>
@@ -3149,23 +3014,50 @@
                 <a:cs typeface="Arial Black" charset="0"/>
               </a:rPr>
             </a:br>
-            <a:r>
-              <a:rPr lang="en-US" sz="4000" dirty="0" smtClean="0">
-                <a:latin typeface="Arial Black" charset="0"/>
-                <a:ea typeface="Arial Black" charset="0"/>
-                <a:cs typeface="Arial Black" charset="0"/>
-              </a:rPr>
-              <a:t/>
-            </a:r>
             <a:br>
-              <a:rPr lang="en-US" sz="4000" dirty="0" smtClean="0">
+              <a:rPr lang="en-US" sz="4000" dirty="0">
                 <a:latin typeface="Arial Black" charset="0"/>
                 <a:ea typeface="Arial Black" charset="0"/>
                 <a:cs typeface="Arial Black" charset="0"/>
               </a:rPr>
             </a:br>
-            <a:r>
-              <a:rPr lang="en-US" sz="6700" dirty="0" smtClean="0">
+            <a:br>
+              <a:rPr lang="en-US" sz="4000" dirty="0">
+                <a:latin typeface="Arial Black" charset="0"/>
+                <a:ea typeface="Arial Black" charset="0"/>
+                <a:cs typeface="Arial Black" charset="0"/>
+              </a:rPr>
+            </a:br>
+            <a:br>
+              <a:rPr lang="en-US" sz="4000" dirty="0">
+                <a:latin typeface="Arial Black" charset="0"/>
+                <a:ea typeface="Arial Black" charset="0"/>
+                <a:cs typeface="Arial Black" charset="0"/>
+              </a:rPr>
+            </a:br>
+            <a:br>
+              <a:rPr lang="en-US" sz="4000" dirty="0">
+                <a:latin typeface="Arial Black" charset="0"/>
+                <a:ea typeface="Arial Black" charset="0"/>
+                <a:cs typeface="Arial Black" charset="0"/>
+              </a:rPr>
+            </a:br>
+            <a:br>
+              <a:rPr lang="en-US" sz="4000" dirty="0">
+                <a:latin typeface="Arial Black" charset="0"/>
+                <a:ea typeface="Arial Black" charset="0"/>
+                <a:cs typeface="Arial Black" charset="0"/>
+              </a:rPr>
+            </a:br>
+            <a:br>
+              <a:rPr lang="en-US" sz="4000" dirty="0">
+                <a:latin typeface="Arial Black" charset="0"/>
+                <a:ea typeface="Arial Black" charset="0"/>
+                <a:cs typeface="Arial Black" charset="0"/>
+              </a:rPr>
+            </a:br>
+            <a:r>
+              <a:rPr lang="en-US" sz="6700" dirty="0">
                 <a:latin typeface="Arial Black" charset="0"/>
                 <a:ea typeface="Arial Black" charset="0"/>
                 <a:cs typeface="Arial Black" charset="0"/>
@@ -3173,68 +3065,52 @@
               <a:t>Problems</a:t>
             </a:r>
             <a:br>
-              <a:rPr lang="en-US" sz="6700" dirty="0" smtClean="0">
+              <a:rPr lang="en-US" sz="6700" dirty="0">
                 <a:latin typeface="Arial Black" charset="0"/>
                 <a:ea typeface="Arial Black" charset="0"/>
                 <a:cs typeface="Arial Black" charset="0"/>
               </a:rPr>
             </a:br>
             <a:r>
-              <a:rPr lang="en-US" sz="6700" dirty="0" smtClean="0">
+              <a:rPr lang="en-US" sz="6700" dirty="0">
                 <a:latin typeface="Arial Black" charset="0"/>
                 <a:ea typeface="Arial Black" charset="0"/>
                 <a:cs typeface="Arial Black" charset="0"/>
               </a:rPr>
               <a:t>on</a:t>
             </a:r>
-            <a:r>
-              <a:rPr lang="en-US" sz="6700" smtClean="0">
-                <a:latin typeface="Arial Black" charset="0"/>
-                <a:ea typeface="Arial Black" charset="0"/>
-                <a:cs typeface="Arial Black" charset="0"/>
-              </a:rPr>
-              <a:t/>
-            </a:r>
             <a:br>
-              <a:rPr lang="en-US" sz="6700" smtClean="0">
+              <a:rPr lang="en-US" sz="6700" dirty="0">
                 <a:latin typeface="Arial Black" charset="0"/>
                 <a:ea typeface="Arial Black" charset="0"/>
                 <a:cs typeface="Arial Black" charset="0"/>
               </a:rPr>
             </a:br>
             <a:r>
-              <a:rPr lang="en-US" sz="6700" smtClean="0">
+              <a:rPr lang="en-US" sz="6700" dirty="0">
                 <a:latin typeface="Arial Black" charset="0"/>
                 <a:ea typeface="Arial Black" charset="0"/>
                 <a:cs typeface="Arial Black" charset="0"/>
               </a:rPr>
               <a:t>Testing</a:t>
             </a:r>
-            <a:r>
-              <a:rPr lang="en-US" sz="6700" dirty="0" smtClean="0">
-                <a:latin typeface="Arial Black" charset="0"/>
-                <a:ea typeface="Arial Black" charset="0"/>
-                <a:cs typeface="Arial Black" charset="0"/>
-              </a:rPr>
-              <a:t/>
-            </a:r>
             <a:br>
-              <a:rPr lang="en-US" sz="6700" dirty="0" smtClean="0">
+              <a:rPr lang="en-US" sz="6700" dirty="0">
                 <a:latin typeface="Arial Black" charset="0"/>
                 <a:ea typeface="Arial Black" charset="0"/>
                 <a:cs typeface="Arial Black" charset="0"/>
               </a:rPr>
             </a:br>
             <a:r>
-              <a:rPr lang="en-US" sz="6700" dirty="0" smtClean="0">
+              <a:rPr lang="en-US" altLang="ko-KR" sz="6700" dirty="0">
                 <a:latin typeface="Arial Black" charset="0"/>
                 <a:ea typeface="Arial Black" charset="0"/>
                 <a:cs typeface="Arial Black" charset="0"/>
               </a:rPr>
-              <a:t/>
+              <a:t>2010</a:t>
             </a:r>
             <a:br>
-              <a:rPr lang="en-US" sz="6700" dirty="0" smtClean="0">
+              <a:rPr lang="en-US" sz="6700" dirty="0">
                 <a:latin typeface="Arial Black" charset="0"/>
                 <a:ea typeface="Arial Black" charset="0"/>
                 <a:cs typeface="Arial Black" charset="0"/>
@@ -3287,6 +3163,126 @@
 </p:sld>
 </file>
 
+<file path=ppt/slides/slide10.xml><?xml version="1.0" encoding="utf-8"?>
+<p:sld xmlns:a="http://schemas.openxmlformats.org/drawingml/2006/main" xmlns:r="http://schemas.openxmlformats.org/officeDocument/2006/relationships" xmlns:p="http://schemas.openxmlformats.org/presentationml/2006/main">
+  <p:cSld>
+    <p:spTree>
+      <p:nvGrpSpPr>
+        <p:cNvPr id="1" name=""/>
+        <p:cNvGrpSpPr/>
+        <p:nvPr/>
+      </p:nvGrpSpPr>
+      <p:grpSpPr>
+        <a:xfrm>
+          <a:off x="0" y="0"/>
+          <a:ext cx="0" cy="0"/>
+          <a:chOff x="0" y="0"/>
+          <a:chExt cx="0" cy="0"/>
+        </a:xfrm>
+      </p:grpSpPr>
+      <p:pic>
+        <p:nvPicPr>
+          <p:cNvPr id="2" name="Picture 1"/>
+          <p:cNvPicPr>
+            <a:picLocks noChangeAspect="1"/>
+          </p:cNvPicPr>
+          <p:nvPr/>
+        </p:nvPicPr>
+        <p:blipFill>
+          <a:blip r:embed="rId2">
+            <a:extLst>
+              <a:ext uri="{28A0092B-C50C-407E-A947-70E740481C1C}">
+                <a14:useLocalDpi xmlns:a14="http://schemas.microsoft.com/office/drawing/2010/main" val="0"/>
+              </a:ext>
+            </a:extLst>
+          </a:blip>
+          <a:stretch>
+            <a:fillRect/>
+          </a:stretch>
+        </p:blipFill>
+        <p:spPr>
+          <a:xfrm>
+            <a:off x="3289300" y="290407"/>
+            <a:ext cx="5412740" cy="3778973"/>
+          </a:xfrm>
+          <a:prstGeom prst="rect">
+            <a:avLst/>
+          </a:prstGeom>
+        </p:spPr>
+      </p:pic>
+      <p:pic>
+        <p:nvPicPr>
+          <p:cNvPr id="3" name="Picture 2"/>
+          <p:cNvPicPr>
+            <a:picLocks noChangeAspect="1"/>
+          </p:cNvPicPr>
+          <p:nvPr/>
+        </p:nvPicPr>
+        <p:blipFill>
+          <a:blip r:embed="rId3">
+            <a:extLst>
+              <a:ext uri="{28A0092B-C50C-407E-A947-70E740481C1C}">
+                <a14:useLocalDpi xmlns:a14="http://schemas.microsoft.com/office/drawing/2010/main" val="0"/>
+              </a:ext>
+            </a:extLst>
+          </a:blip>
+          <a:stretch>
+            <a:fillRect/>
+          </a:stretch>
+        </p:blipFill>
+        <p:spPr>
+          <a:xfrm>
+            <a:off x="2268855" y="4395722"/>
+            <a:ext cx="7453630" cy="2279398"/>
+          </a:xfrm>
+          <a:prstGeom prst="rect">
+            <a:avLst/>
+          </a:prstGeom>
+        </p:spPr>
+      </p:pic>
+      <p:pic>
+        <p:nvPicPr>
+          <p:cNvPr id="5" name="Picture 4" descr="A screenshot of a cell phone&#10;&#10;Description automatically generated">
+            <a:extLst>
+              <a:ext uri="{FF2B5EF4-FFF2-40B4-BE49-F238E27FC236}">
+                <a16:creationId xmlns:a16="http://schemas.microsoft.com/office/drawing/2014/main" id="{BB98A763-975E-5A41-9769-AC5B73BA60D3}"/>
+              </a:ext>
+            </a:extLst>
+          </p:cNvPr>
+          <p:cNvPicPr>
+            <a:picLocks noChangeAspect="1"/>
+          </p:cNvPicPr>
+          <p:nvPr/>
+        </p:nvPicPr>
+        <p:blipFill>
+          <a:blip r:embed="rId4"/>
+          <a:stretch>
+            <a:fillRect/>
+          </a:stretch>
+        </p:blipFill>
+        <p:spPr>
+          <a:xfrm>
+            <a:off x="2971322" y="290407"/>
+            <a:ext cx="6249356" cy="1926615"/>
+          </a:xfrm>
+          <a:prstGeom prst="rect">
+            <a:avLst/>
+          </a:prstGeom>
+        </p:spPr>
+      </p:pic>
+    </p:spTree>
+    <p:extLst>
+      <p:ext uri="{BB962C8B-B14F-4D97-AF65-F5344CB8AC3E}">
+        <p14:creationId xmlns:p14="http://schemas.microsoft.com/office/powerpoint/2010/main" val="2907315155"/>
+      </p:ext>
+    </p:extLst>
+  </p:cSld>
+  <p:clrMapOvr>
+    <a:masterClrMapping/>
+  </p:clrMapOvr>
+</p:sld>
+</file>
+
 <file path=ppt/slides/slide2.xml><?xml version="1.0" encoding="utf-8"?>
 <p:sld xmlns:a="http://schemas.openxmlformats.org/drawingml/2006/main" xmlns:r="http://schemas.openxmlformats.org/officeDocument/2006/relationships" xmlns:p="http://schemas.openxmlformats.org/presentationml/2006/main">
   <p:cSld>
@@ -3322,18 +3318,13 @@
           <a:lstStyle/>
           <a:p>
             <a:r>
-              <a:rPr lang="en-US" sz="4000" dirty="0" smtClean="0">
+              <a:rPr lang="en-US" sz="4000" dirty="0">
                 <a:latin typeface="Arial Black" charset="0"/>
                 <a:ea typeface="Arial Black" charset="0"/>
                 <a:cs typeface="Arial Black" charset="0"/>
               </a:rPr>
               <a:t>Reference</a:t>
             </a:r>
-            <a:endParaRPr lang="en-US" sz="4000" dirty="0">
-              <a:latin typeface="Arial Black" charset="0"/>
-              <a:ea typeface="Arial Black" charset="0"/>
-              <a:cs typeface="Arial Black" charset="0"/>
-            </a:endParaRPr>
           </a:p>
         </p:txBody>
       </p:sp>
@@ -3352,7 +3343,7 @@
           <a:bodyPr/>
           <a:lstStyle/>
           <a:p>
-            <a:endParaRPr lang="en-US" sz="2000" dirty="0" smtClean="0">
+            <a:endParaRPr lang="en-US" sz="2000" dirty="0">
               <a:latin typeface="Arial Black" charset="0"/>
               <a:ea typeface="Arial Black" charset="0"/>
               <a:cs typeface="Arial Black" charset="0"/>
@@ -3361,7 +3352,7 @@
           </a:p>
           <a:p>
             <a:r>
-              <a:rPr lang="en-US" sz="2000" dirty="0" smtClean="0">
+              <a:rPr lang="en-US" sz="2000" dirty="0">
                 <a:latin typeface="Arial Black" charset="0"/>
                 <a:ea typeface="Arial Black" charset="0"/>
                 <a:cs typeface="Arial Black" charset="0"/>
@@ -3369,14 +3360,14 @@
               </a:rPr>
               <a:t>Data</a:t>
             </a:r>
-            <a:endParaRPr lang="en-US" sz="2000" dirty="0" smtClean="0">
+            <a:endParaRPr lang="en-US" sz="2000" dirty="0">
               <a:latin typeface="Arial Black" charset="0"/>
               <a:ea typeface="Arial Black" charset="0"/>
               <a:cs typeface="Arial Black" charset="0"/>
             </a:endParaRPr>
           </a:p>
           <a:p>
-            <a:endParaRPr lang="en-US" sz="2000" dirty="0" smtClean="0">
+            <a:endParaRPr lang="en-US" sz="2000" dirty="0">
               <a:latin typeface="Arial Black" charset="0"/>
               <a:ea typeface="Arial Black" charset="0"/>
               <a:cs typeface="Arial Black" charset="0"/>
@@ -3384,7 +3375,7 @@
           </a:p>
           <a:p>
             <a:r>
-              <a:rPr lang="en-US" sz="2000" dirty="0" smtClean="0">
+              <a:rPr lang="en-US" sz="2000" dirty="0">
                 <a:latin typeface="Arial Black" charset="0"/>
                 <a:ea typeface="Arial Black" charset="0"/>
                 <a:cs typeface="Arial Black" charset="0"/>
@@ -3392,14 +3383,14 @@
               </a:rPr>
               <a:t>Youtube</a:t>
             </a:r>
-            <a:endParaRPr lang="en-US" sz="2000" dirty="0" smtClean="0">
+            <a:endParaRPr lang="en-US" sz="2000" dirty="0">
               <a:latin typeface="Arial Black" charset="0"/>
               <a:ea typeface="Arial Black" charset="0"/>
               <a:cs typeface="Arial Black" charset="0"/>
             </a:endParaRPr>
           </a:p>
           <a:p>
-            <a:endParaRPr lang="en-US" dirty="0" smtClean="0">
+            <a:endParaRPr lang="en-US" dirty="0">
               <a:latin typeface="Arial Black" charset="0"/>
               <a:ea typeface="Arial Black" charset="0"/>
               <a:cs typeface="Arial Black" charset="0"/>
@@ -3407,7 +3398,7 @@
           </a:p>
           <a:p>
             <a:r>
-              <a:rPr lang="en-US" sz="2000" dirty="0" smtClean="0">
+              <a:rPr lang="en-US" sz="2000" dirty="0">
                 <a:latin typeface="Arial Black" charset="0"/>
                 <a:ea typeface="Arial Black" charset="0"/>
                 <a:cs typeface="Arial Black" charset="0"/>
@@ -3415,7 +3406,7 @@
               </a:rPr>
               <a:t>Code</a:t>
             </a:r>
-            <a:endParaRPr lang="en-US" sz="2000" dirty="0" smtClean="0">
+            <a:endParaRPr lang="en-US" sz="2000" dirty="0">
               <a:latin typeface="Arial Black" charset="0"/>
               <a:ea typeface="Arial Black" charset="0"/>
               <a:cs typeface="Arial Black" charset="0"/>
@@ -3434,13 +3425,6 @@
   <p:clrMapOvr>
     <a:masterClrMapping/>
   </p:clrMapOvr>
-  <p:timing>
-    <p:tnLst>
-      <p:par>
-        <p:cTn id="1" dur="indefinite" restart="never" nodeType="tmRoot"/>
-      </p:par>
-    </p:tnLst>
-  </p:timing>
 </p:sld>
 </file>
 
@@ -3461,44 +3445,6 @@
           <a:chExt cx="0" cy="0"/>
         </a:xfrm>
       </p:grpSpPr>
-      <p:sp>
-        <p:nvSpPr>
-          <p:cNvPr id="3" name="TextBox 2"/>
-          <p:cNvSpPr txBox="1"/>
-          <p:nvPr/>
-        </p:nvSpPr>
-        <p:spPr>
-          <a:xfrm>
-            <a:off x="10125635" y="5970494"/>
-            <a:ext cx="1951175" cy="707886"/>
-          </a:xfrm>
-          <a:prstGeom prst="rect">
-            <a:avLst/>
-          </a:prstGeom>
-          <a:noFill/>
-        </p:spPr>
-        <p:txBody>
-          <a:bodyPr wrap="none" rtlCol="0">
-            <a:spAutoFit/>
-          </a:bodyPr>
-          <a:lstStyle/>
-          <a:p>
-            <a:r>
-              <a:rPr lang="en-US" sz="4000" dirty="0" smtClean="0">
-                <a:latin typeface="Arial Black" charset="0"/>
-                <a:ea typeface="Arial Black" charset="0"/>
-                <a:cs typeface="Arial Black" charset="0"/>
-              </a:rPr>
-              <a:t>[2010]</a:t>
-            </a:r>
-            <a:endParaRPr lang="en-US" sz="4000" dirty="0">
-              <a:latin typeface="Arial Black" charset="0"/>
-              <a:ea typeface="Arial Black" charset="0"/>
-              <a:cs typeface="Arial Black" charset="0"/>
-            </a:endParaRPr>
-          </a:p>
-        </p:txBody>
-      </p:sp>
       <p:pic>
         <p:nvPicPr>
           <p:cNvPr id="4" name="Picture 3"/>
@@ -3529,6 +3475,45 @@
           </a:prstGeom>
         </p:spPr>
       </p:pic>
+      <p:sp>
+        <p:nvSpPr>
+          <p:cNvPr id="5" name="TextBox 4">
+            <a:extLst>
+              <a:ext uri="{FF2B5EF4-FFF2-40B4-BE49-F238E27FC236}">
+                <a16:creationId xmlns:a16="http://schemas.microsoft.com/office/drawing/2014/main" id="{DC9FBAF7-0CD7-274A-9F75-0BD3B73EC5F6}"/>
+              </a:ext>
+            </a:extLst>
+          </p:cNvPr>
+          <p:cNvSpPr txBox="1"/>
+          <p:nvPr/>
+        </p:nvSpPr>
+        <p:spPr>
+          <a:xfrm>
+            <a:off x="10125635" y="5970494"/>
+            <a:ext cx="1951175" cy="707886"/>
+          </a:xfrm>
+          <a:prstGeom prst="rect">
+            <a:avLst/>
+          </a:prstGeom>
+          <a:noFill/>
+        </p:spPr>
+        <p:txBody>
+          <a:bodyPr wrap="none" rtlCol="0">
+            <a:spAutoFit/>
+          </a:bodyPr>
+          <a:lstStyle/>
+          <a:p>
+            <a:r>
+              <a:rPr lang="en-US" sz="4000" dirty="0">
+                <a:latin typeface="Arial Black" charset="0"/>
+                <a:ea typeface="Arial Black" charset="0"/>
+                <a:cs typeface="Arial Black" charset="0"/>
+              </a:rPr>
+              <a:t>[2010]</a:t>
+            </a:r>
+          </a:p>
+        </p:txBody>
+      </p:sp>
     </p:spTree>
     <p:extLst>
       <p:ext uri="{BB962C8B-B14F-4D97-AF65-F5344CB8AC3E}">
@@ -3582,18 +3567,13 @@
           <a:lstStyle/>
           <a:p>
             <a:r>
-              <a:rPr lang="en-US" sz="4000" dirty="0" smtClean="0">
+              <a:rPr lang="en-US" sz="4000" dirty="0">
                 <a:latin typeface="Arial Black" charset="0"/>
                 <a:ea typeface="Arial Black" charset="0"/>
                 <a:cs typeface="Arial Black" charset="0"/>
               </a:rPr>
               <a:t>[2010]</a:t>
             </a:r>
-            <a:endParaRPr lang="en-US" sz="4000" dirty="0">
-              <a:latin typeface="Arial Black" charset="0"/>
-              <a:ea typeface="Arial Black" charset="0"/>
-              <a:cs typeface="Arial Black" charset="0"/>
-            </a:endParaRPr>
           </a:p>
         </p:txBody>
       </p:sp>
@@ -3680,18 +3660,13 @@
           <a:lstStyle/>
           <a:p>
             <a:r>
-              <a:rPr lang="en-US" sz="4000" dirty="0" smtClean="0">
+              <a:rPr lang="en-US" sz="4000" dirty="0">
                 <a:latin typeface="Arial Black" charset="0"/>
                 <a:ea typeface="Arial Black" charset="0"/>
                 <a:cs typeface="Arial Black" charset="0"/>
               </a:rPr>
               <a:t>[2010]</a:t>
             </a:r>
-            <a:endParaRPr lang="en-US" sz="4000" dirty="0">
-              <a:latin typeface="Arial Black" charset="0"/>
-              <a:ea typeface="Arial Black" charset="0"/>
-              <a:cs typeface="Arial Black" charset="0"/>
-            </a:endParaRPr>
           </a:p>
         </p:txBody>
       </p:sp>
